--- a/dist/초3/영어/읽기와문화/초3_영어_읽기와문화_02_나라별인사문화.pptx
+++ b/dist/초3/영어/읽기와문화/초3_영어_읽기와문화_02_나라별인사문화.pptx
@@ -120,13 +120,13 @@
   <p:extLst>
     <p:ext uri="{521415D9-36F7-43E2-AB2F-B90AF26B5E84}">
       <p14:sectionLst xmlns:p14="http://schemas.microsoft.com/office/powerpoint/2010/main">
-        <p14:section name="도입" id="{988ca06b-0254-de87-fe59-03c6b13674e3}">
+        <p14:section name="도입" id="{057c7116-18d4-489e-5a3a-07f0bcf66475}">
           <p14:sldIdLst>
             <p14:sldId id="256"/>
             <p14:sldId id="257"/>
           </p14:sldIdLst>
         </p14:section>
-        <p14:section name="개념" id="{a4b24b4d-9b2c-d7bd-7b7a-221ef2694aca}">
+        <p14:section name="개념" id="{1c77d5f7-5ce4-7a72-02d6-2df28f81a6fb}">
           <p14:sldIdLst>
             <p14:sldId id="258"/>
             <p14:sldId id="259"/>
@@ -134,32 +134,32 @@
             <p14:sldId id="262"/>
           </p14:sldIdLst>
         </p14:section>
-        <p14:section name="연습" id="{630da272-ebae-23de-b91c-6eece6cedc20}">
+        <p14:section name="연습" id="{2a2f9c30-4ec4-9758-5edd-2d3399847647}">
           <p14:sldIdLst>
             <p14:sldId id="261"/>
             <p14:sldId id="263"/>
             <p14:sldId id="264"/>
           </p14:sldIdLst>
         </p14:section>
-        <p14:section name="개념" id="{5a2c069f-d422-4a89-deec-5162056e775b}">
+        <p14:section name="개념" id="{3000b530-1e3d-4db9-33f6-06ba62c9e608}">
           <p14:sldIdLst/>
         </p14:section>
-        <p14:section name="연습" id="{8ad2d5ce-4ec8-03b8-582d-b965a45a9230}">
+        <p14:section name="연습" id="{a708cb49-034a-751b-eee5-083127a7ecfc}">
           <p14:sldIdLst/>
         </p14:section>
-        <p14:section name="확인" id="{f84f9dab-59e8-d0ac-5d5c-aff37176420b}">
+        <p14:section name="확인" id="{f7a56b46-117b-a1f8-b374-5bda7d2caea3}">
           <p14:sldIdLst>
             <p14:sldId id="265"/>
             <p14:sldId id="266"/>
             <p14:sldId id="267"/>
           </p14:sldIdLst>
         </p14:section>
-        <p14:section name="정리" id="{54ceb02e-6be1-ad47-6aff-b9f32946fd47}">
+        <p14:section name="정리" id="{5782d764-2333-05f5-9b56-f8ebd97674df}">
           <p14:sldIdLst>
             <p14:sldId id="268"/>
           </p14:sldIdLst>
         </p14:section>
-        <p14:section name="보충" id="{ebbb79e2-50c7-7981-5453-d7eadea2e12c}">
+        <p14:section name="보충" id="{1f6c30d8-b0f8-d339-194a-0f838c5f7d63}">
           <p14:sldIdLst>
             <p14:sldId id="269"/>
           </p14:sldIdLst>

--- a/dist/초3/영어/읽기와문화/초3_영어_읽기와문화_02_나라별인사문화.pptx
+++ b/dist/초3/영어/읽기와문화/초3_영어_읽기와문화_02_나라별인사문화.pptx
@@ -120,13 +120,13 @@
   <p:extLst>
     <p:ext uri="{521415D9-36F7-43E2-AB2F-B90AF26B5E84}">
       <p14:sectionLst xmlns:p14="http://schemas.microsoft.com/office/powerpoint/2010/main">
-        <p14:section name="도입" id="{057c7116-18d4-489e-5a3a-07f0bcf66475}">
+        <p14:section name="도입" id="{133eaad0-898c-2ad2-87fc-d9591701ca57}">
           <p14:sldIdLst>
             <p14:sldId id="256"/>
             <p14:sldId id="257"/>
           </p14:sldIdLst>
         </p14:section>
-        <p14:section name="개념" id="{1c77d5f7-5ce4-7a72-02d6-2df28f81a6fb}">
+        <p14:section name="개념" id="{f9313d19-2df2-899b-d5b0-11e3ac0fead2}">
           <p14:sldIdLst>
             <p14:sldId id="258"/>
             <p14:sldId id="259"/>
@@ -134,32 +134,32 @@
             <p14:sldId id="262"/>
           </p14:sldIdLst>
         </p14:section>
-        <p14:section name="연습" id="{2a2f9c30-4ec4-9758-5edd-2d3399847647}">
+        <p14:section name="연습" id="{89e72872-1f3c-603f-b352-553304a9d576}">
           <p14:sldIdLst>
             <p14:sldId id="261"/>
             <p14:sldId id="263"/>
             <p14:sldId id="264"/>
           </p14:sldIdLst>
         </p14:section>
-        <p14:section name="개념" id="{3000b530-1e3d-4db9-33f6-06ba62c9e608}">
+        <p14:section name="개념" id="{694f4dbf-4e3c-30f5-9db3-a8e84b07790a}">
           <p14:sldIdLst/>
         </p14:section>
-        <p14:section name="연습" id="{a708cb49-034a-751b-eee5-083127a7ecfc}">
+        <p14:section name="연습" id="{a5035a92-f813-4a67-8693-26b5a0d33a75}">
           <p14:sldIdLst/>
         </p14:section>
-        <p14:section name="확인" id="{f7a56b46-117b-a1f8-b374-5bda7d2caea3}">
+        <p14:section name="확인" id="{292a0d2d-b5e2-4184-d089-9ee8b8bad6ce}">
           <p14:sldIdLst>
             <p14:sldId id="265"/>
             <p14:sldId id="266"/>
             <p14:sldId id="267"/>
           </p14:sldIdLst>
         </p14:section>
-        <p14:section name="정리" id="{5782d764-2333-05f5-9b56-f8ebd97674df}">
+        <p14:section name="정리" id="{70707aae-3122-70ec-4b77-321f2403c9b4}">
           <p14:sldIdLst>
             <p14:sldId id="268"/>
           </p14:sldIdLst>
         </p14:section>
-        <p14:section name="보충" id="{1f6c30d8-b0f8-d339-194a-0f838c5f7d63}">
+        <p14:section name="보충" id="{918ecff0-26f7-3cde-9b7d-57cddf5a8987}">
           <p14:sldIdLst>
             <p14:sldId id="269"/>
           </p14:sldIdLst>
@@ -8001,7 +8001,7 @@
           </p:nvPr>
         </p:nvGraphicFramePr>
         <p:xfrm>
-          <a:off x="1065276" y="1805940"/>
+          <a:off x="1065276" y="1778508"/>
           <a:ext cx="10058400" cy="914400"/>
         </p:xfrm>
         <a:graphic>
@@ -8013,7 +8013,7 @@
                 <a:gridCol w="4626864"/>
                 <a:gridCol w="2615184"/>
               </a:tblGrid>
-              <a:tr h="472440">
+              <a:tr h="481584">
                 <a:tc>
                   <a:txBody>
                     <a:bodyPr/>
@@ -8219,7 +8219,7 @@
                   </a:tcPr>
                 </a:tc>
               </a:tr>
-              <a:tr h="472440">
+              <a:tr h="481584">
                 <a:tc>
                   <a:txBody>
                     <a:bodyPr/>
@@ -8425,7 +8425,7 @@
                   </a:tcPr>
                 </a:tc>
               </a:tr>
-              <a:tr h="472440">
+              <a:tr h="481584">
                 <a:tc>
                   <a:txBody>
                     <a:bodyPr/>
@@ -8631,7 +8631,7 @@
                   </a:tcPr>
                 </a:tc>
               </a:tr>
-              <a:tr h="472440">
+              <a:tr h="481584">
                 <a:tc>
                   <a:txBody>
                     <a:bodyPr/>
@@ -8837,7 +8837,7 @@
                   </a:tcPr>
                 </a:tc>
               </a:tr>
-              <a:tr h="472440">
+              <a:tr h="481584">
                 <a:tc>
                   <a:txBody>
                     <a:bodyPr/>
@@ -9043,7 +9043,7 @@
                   </a:tcPr>
                 </a:tc>
               </a:tr>
-              <a:tr h="472440">
+              <a:tr h="481584">
                 <a:tc>
                   <a:txBody>
                     <a:bodyPr/>
